--- a/docs/BOSS招聘系统操作指南.pptx
+++ b/docs/BOSS招聘系统操作指南.pptx
@@ -3734,7 +3734,7 @@
                 </a:solidFill>
                 <a:latin typeface="Microsoft YaHei"/>
               </a:rPr>
-              <a:t>操作指南</a:t>
+              <a:t>操作指南 v2.11</a:t>
             </a:r>
             <a:r>
               <a:rPr sz="1000" b="1" i="0" dirty="0">
@@ -3743,7 +3743,7 @@
                 </a:solidFill>
                 <a:latin typeface="Microsoft YaHei"/>
               </a:rPr>
-              <a:t> v2.9</a:t>
+              <a:t/>
             </a:r>
             <a:r>
               <a:rPr lang="en-US" sz="1000" b="1" dirty="0">
@@ -3752,7 +3752,7 @@
                 </a:solidFill>
                 <a:latin typeface="Microsoft YaHei"/>
               </a:rPr>
-              <a:t>.2</a:t>
+              <a:t/>
             </a:r>
             <a:endParaRPr sz="1000" b="1" i="0" dirty="0">
               <a:solidFill>
@@ -4080,7 +4080,7 @@
                 </a:solidFill>
                 <a:latin typeface="Microsoft YaHei"/>
               </a:rPr>
-              <a:t>四维评分模型 + AI 调整分，最终决定推荐等级</a:t>
+              <a:t>四维评分 + AI 调整 + 简历评估，三层叠加决定推荐等级</a:t>
             </a:r>
           </a:p>
         </p:txBody>
@@ -5650,7 +5650,7 @@
                 </a:solidFill>
                 <a:latin typeface="Microsoft YaHei"/>
               </a:rPr>
-              <a:t>• 调整后叠加到规则评分</a:t>
+              <a:t>• 叠加公式：规则分 + AI 调整 + 简历调整</a:t>
             </a:r>
           </a:p>
         </p:txBody>
@@ -5685,7 +5685,7 @@
                 </a:solidFill>
                 <a:latin typeface="Microsoft YaHei"/>
               </a:rPr>
-              <a:t>• 最多 50 人/次，并发 3 路</a:t>
+              <a:t>• 默认并发 5 路，429 限流退避</a:t>
             </a:r>
           </a:p>
         </p:txBody>
@@ -5720,7 +5720,7 @@
                 </a:solidFill>
                 <a:latin typeface="Microsoft YaHei"/>
               </a:rPr>
-              <a:t>• 含 429 限流退避保护</a:t>
+              <a:t>• 简历导入后再做二次评估（±10）</a:t>
             </a:r>
           </a:p>
         </p:txBody>
@@ -5756,6 +5756,73 @@
                 <a:latin typeface="Microsoft YaHei"/>
               </a:rPr>
               <a:t>10 / 15</a:t>
+            </a:r>
+          </a:p>
+        </p:txBody>
+      </p:sp>
+      <p:sp>
+        <p:nvSpPr>
+          <p:cNvPr id="47" name="TextBox 46"/>
+          <p:cNvSpPr txBox="1"/>
+          <p:nvPr/>
+        </p:nvSpPr>
+        <p:spPr>
+          <a:xfrm>
+            <a:off x="7132320" y="4743440"/>
+            <a:ext cx="4114800" cy="219456"/>
+          </a:xfrm>
+          <a:prstGeom prst="rect">
+            <a:avLst/>
+          </a:prstGeom>
+          <a:noFill/>
+        </p:spPr>
+        <p:txBody>
+          <a:bodyPr wrap="square">
+            <a:spAutoFit/>
+          </a:bodyPr>
+          <a:lstStyle/>
+          <a:p>
+            <a:r>
+              <a:rPr sz="1600" b="1">
+                <a:solidFill>
+                  <a:srgbClr val="1B2838"/>
+                </a:solidFill>
+                <a:latin typeface="Microsoft YaHei"/>
+              </a:rPr>
+              <a:t>📄 简历二次评估</a:t>
+            </a:r>
+          </a:p>
+          <a:p>
+            <a:r>
+              <a:rPr sz="1600">
+                <a:solidFill>
+                  <a:srgbClr val="1B2838"/>
+                </a:solidFill>
+                <a:latin typeface="Microsoft YaHei"/>
+              </a:rPr>
+              <a:t>• 导入候选人 PDF/Word 简历</a:t>
+            </a:r>
+          </a:p>
+          <a:p>
+            <a:r>
+              <a:rPr sz="1600">
+                <a:solidFill>
+                  <a:srgbClr val="1B2838"/>
+                </a:solidFill>
+                <a:latin typeface="Microsoft YaHei"/>
+              </a:rPr>
+              <a:t>• LLM 基于完整简历做二次评估</a:t>
+            </a:r>
+          </a:p>
+          <a:p>
+            <a:r>
+              <a:rPr sz="1600">
+                <a:solidFill>
+                  <a:srgbClr val="1B2838"/>
+                </a:solidFill>
+                <a:latin typeface="Microsoft YaHei"/>
+              </a:rPr>
+              <a:t>• 调整分 ±10，叠加到最终匹配分</a:t>
             </a:r>
           </a:p>
         </p:txBody>
@@ -5902,7 +5969,7 @@
                 </a:solidFill>
                 <a:latin typeface="Microsoft YaHei"/>
               </a:rPr>
-              <a:t>查看候选人列表、右键操作、单独打招呼、导出 Excel</a:t>
+              <a:t>候选人列表 · 黑名单 · 导入简历做二次评估 · 导出 Excel</a:t>
             </a:r>
           </a:p>
         </p:txBody>
@@ -6567,7 +6634,7 @@
                 </a:solidFill>
                 <a:latin typeface="Microsoft YaHei"/>
               </a:rPr>
-              <a:t>操作前自动备份</a:t>
+              <a:t>操作前备份；黑名单记录保留</a:t>
             </a:r>
           </a:p>
         </p:txBody>
@@ -6672,7 +6739,7 @@
                 </a:solidFill>
                 <a:latin typeface="Microsoft YaHei"/>
               </a:rPr>
-              <a:t>▸ 单独打招呼（定位卡片）</a:t>
+              <a:t>▸ 单独打招呼 / 加入黑名单</a:t>
             </a:r>
           </a:p>
         </p:txBody>
@@ -6707,7 +6774,7 @@
                 </a:solidFill>
                 <a:latin typeface="Microsoft YaHei"/>
               </a:rPr>
-              <a:t>▸ 移除候选人</a:t>
+              <a:t>▸ 导入简历 / 移除候选人</a:t>
             </a:r>
           </a:p>
         </p:txBody>
@@ -12742,7 +12809,7 @@
                 </a:solidFill>
                 <a:latin typeface="Microsoft YaHei"/>
               </a:rPr>
-              <a:t>BOSS </a:t>
+              <a:t>BOSS 招聘系统 v2.11 · 操作指南 · 2026</a:t>
             </a:r>
             <a:r>
               <a:rPr sz="1100" b="0" i="0" dirty="0" err="1">
@@ -12751,7 +12818,7 @@
                 </a:solidFill>
                 <a:latin typeface="Microsoft YaHei"/>
               </a:rPr>
-              <a:t>招聘系统</a:t>
+              <a:t/>
             </a:r>
             <a:r>
               <a:rPr sz="1100" b="0" i="0" dirty="0">
@@ -12760,7 +12827,7 @@
                 </a:solidFill>
                 <a:latin typeface="Microsoft YaHei"/>
               </a:rPr>
-              <a:t> v2.9</a:t>
+              <a:t/>
             </a:r>
             <a:r>
               <a:rPr lang="en-US" sz="1100" dirty="0">
@@ -12769,7 +12836,7 @@
                 </a:solidFill>
                 <a:latin typeface="Microsoft YaHei"/>
               </a:rPr>
-              <a:t>.2</a:t>
+              <a:t/>
             </a:r>
             <a:r>
               <a:rPr sz="1100" b="0" i="0" dirty="0">
@@ -12778,7 +12845,7 @@
                 </a:solidFill>
                 <a:latin typeface="Microsoft YaHei"/>
               </a:rPr>
-              <a:t> · </a:t>
+              <a:t/>
             </a:r>
             <a:r>
               <a:rPr sz="1100" b="0" i="0" dirty="0" err="1">
@@ -12787,7 +12854,7 @@
                 </a:solidFill>
                 <a:latin typeface="Microsoft YaHei"/>
               </a:rPr>
-              <a:t>操作指南</a:t>
+              <a:t/>
             </a:r>
             <a:r>
               <a:rPr sz="1100" b="0" i="0" dirty="0">
@@ -12796,7 +12863,7 @@
                 </a:solidFill>
                 <a:latin typeface="Microsoft YaHei"/>
               </a:rPr>
-              <a:t> · 2026</a:t>
+              <a:t/>
             </a:r>
           </a:p>
         </p:txBody>
@@ -13491,7 +13558,7 @@
                 </a:solidFill>
                 <a:latin typeface="Microsoft YaHei"/>
               </a:rPr>
-              <a:t>自动滚动提取</a:t>
+              <a:t>三级提取链路</a:t>
             </a:r>
           </a:p>
         </p:txBody>
@@ -13526,7 +13593,7 @@
                 </a:solidFill>
                 <a:latin typeface="Microsoft YaHei"/>
               </a:rPr>
-              <a:t>智能滚动 + 批量提取候选人卡片</a:t>
+              <a:t>API 直调 + 接口监听 + DOM 滚动兜底</a:t>
             </a:r>
           </a:p>
         </p:txBody>
